--- a/~sasano/lecture/fpl/26/fpl12.pptx
+++ b/~sasano/lecture/fpl/26/fpl12.pptx
@@ -357,7 +357,7 @@
           <a:p>
             <a:fld id="{6C24F061-2875-984E-A862-A9FFC97B3261}" type="datetimeFigureOut">
               <a:rPr kumimoji="1" lang="ja-JP" altLang="en-US" smtClean="0"/>
-              <a:t>2025/1/22</a:t>
+              <a:t>2026/9/30</a:t>
             </a:fld>
             <a:endParaRPr kumimoji="1" lang="ja-JP" altLang="en-US"/>
           </a:p>
@@ -557,7 +557,7 @@
           <a:p>
             <a:fld id="{6C24F061-2875-984E-A862-A9FFC97B3261}" type="datetimeFigureOut">
               <a:rPr kumimoji="1" lang="ja-JP" altLang="en-US" smtClean="0"/>
-              <a:t>2025/1/22</a:t>
+              <a:t>2026/9/30</a:t>
             </a:fld>
             <a:endParaRPr kumimoji="1" lang="ja-JP" altLang="en-US"/>
           </a:p>
@@ -767,7 +767,7 @@
           <a:p>
             <a:fld id="{6C24F061-2875-984E-A862-A9FFC97B3261}" type="datetimeFigureOut">
               <a:rPr kumimoji="1" lang="ja-JP" altLang="en-US" smtClean="0"/>
-              <a:t>2025/1/22</a:t>
+              <a:t>2026/9/30</a:t>
             </a:fld>
             <a:endParaRPr kumimoji="1" lang="ja-JP" altLang="en-US"/>
           </a:p>
@@ -967,7 +967,7 @@
           <a:p>
             <a:fld id="{6C24F061-2875-984E-A862-A9FFC97B3261}" type="datetimeFigureOut">
               <a:rPr kumimoji="1" lang="ja-JP" altLang="en-US" smtClean="0"/>
-              <a:t>2025/1/22</a:t>
+              <a:t>2026/9/30</a:t>
             </a:fld>
             <a:endParaRPr kumimoji="1" lang="ja-JP" altLang="en-US"/>
           </a:p>
@@ -1212,7 +1212,7 @@
           <a:p>
             <a:fld id="{6C24F061-2875-984E-A862-A9FFC97B3261}" type="datetimeFigureOut">
               <a:rPr kumimoji="1" lang="ja-JP" altLang="en-US" smtClean="0"/>
-              <a:t>2025/1/22</a:t>
+              <a:t>2026/9/30</a:t>
             </a:fld>
             <a:endParaRPr kumimoji="1" lang="ja-JP" altLang="en-US"/>
           </a:p>
@@ -1561,7 +1561,7 @@
           <a:p>
             <a:fld id="{6C24F061-2875-984E-A862-A9FFC97B3261}" type="datetimeFigureOut">
               <a:rPr kumimoji="1" lang="ja-JP" altLang="en-US" smtClean="0"/>
-              <a:t>2025/1/22</a:t>
+              <a:t>2026/9/30</a:t>
             </a:fld>
             <a:endParaRPr kumimoji="1" lang="ja-JP" altLang="en-US"/>
           </a:p>
@@ -2044,7 +2044,7 @@
           <a:p>
             <a:fld id="{6C24F061-2875-984E-A862-A9FFC97B3261}" type="datetimeFigureOut">
               <a:rPr kumimoji="1" lang="ja-JP" altLang="en-US" smtClean="0"/>
-              <a:t>2025/1/22</a:t>
+              <a:t>2026/9/30</a:t>
             </a:fld>
             <a:endParaRPr kumimoji="1" lang="ja-JP" altLang="en-US"/>
           </a:p>
@@ -2161,7 +2161,7 @@
           <a:p>
             <a:fld id="{6C24F061-2875-984E-A862-A9FFC97B3261}" type="datetimeFigureOut">
               <a:rPr kumimoji="1" lang="ja-JP" altLang="en-US" smtClean="0"/>
-              <a:t>2025/1/22</a:t>
+              <a:t>2026/9/30</a:t>
             </a:fld>
             <a:endParaRPr kumimoji="1" lang="ja-JP" altLang="en-US"/>
           </a:p>
@@ -2256,7 +2256,7 @@
           <a:p>
             <a:fld id="{6C24F061-2875-984E-A862-A9FFC97B3261}" type="datetimeFigureOut">
               <a:rPr kumimoji="1" lang="ja-JP" altLang="en-US" smtClean="0"/>
-              <a:t>2025/1/22</a:t>
+              <a:t>2026/9/30</a:t>
             </a:fld>
             <a:endParaRPr kumimoji="1" lang="ja-JP" altLang="en-US"/>
           </a:p>
@@ -2563,7 +2563,7 @@
           <a:p>
             <a:fld id="{6C24F061-2875-984E-A862-A9FFC97B3261}" type="datetimeFigureOut">
               <a:rPr kumimoji="1" lang="ja-JP" altLang="en-US" smtClean="0"/>
-              <a:t>2025/1/22</a:t>
+              <a:t>2026/9/30</a:t>
             </a:fld>
             <a:endParaRPr kumimoji="1" lang="ja-JP" altLang="en-US"/>
           </a:p>
@@ -2815,7 +2815,7 @@
           <a:p>
             <a:fld id="{6C24F061-2875-984E-A862-A9FFC97B3261}" type="datetimeFigureOut">
               <a:rPr kumimoji="1" lang="ja-JP" altLang="en-US" smtClean="0"/>
-              <a:t>2025/1/22</a:t>
+              <a:t>2026/9/30</a:t>
             </a:fld>
             <a:endParaRPr kumimoji="1" lang="ja-JP" altLang="en-US"/>
           </a:p>
@@ -3058,7 +3058,7 @@
           <a:p>
             <a:fld id="{6C24F061-2875-984E-A862-A9FFC97B3261}" type="datetimeFigureOut">
               <a:rPr kumimoji="1" lang="ja-JP" altLang="en-US" smtClean="0"/>
-              <a:t>2025/1/22</a:t>
+              <a:t>2026/9/30</a:t>
             </a:fld>
             <a:endParaRPr kumimoji="1" lang="ja-JP" altLang="en-US"/>
           </a:p>
@@ -3505,56 +3505,6 @@
                 <a:schemeClr val="tx1"/>
               </a:solidFill>
             </a:endParaRPr>
-          </a:p>
-        </p:txBody>
-      </p:sp>
-      <p:sp>
-        <p:nvSpPr>
-          <p:cNvPr id="7" name="テキスト ボックス 6"/>
-          <p:cNvSpPr txBox="1"/>
-          <p:nvPr/>
-        </p:nvSpPr>
-        <p:spPr>
-          <a:xfrm>
-            <a:off x="755576" y="4365104"/>
-            <a:ext cx="7776863" cy="1077218"/>
-          </a:xfrm>
-          <a:prstGeom prst="rect">
-            <a:avLst/>
-          </a:prstGeom>
-          <a:noFill/>
-        </p:spPr>
-        <p:txBody>
-          <a:bodyPr wrap="square" rtlCol="0">
-            <a:spAutoFit/>
-          </a:bodyPr>
-          <a:lstStyle/>
-          <a:p>
-            <a:pPr algn="ctr"/>
-            <a:r>
-              <a:rPr kumimoji="1" lang="en-US" altLang="ja-JP" sz="3200" b="0" dirty="0"/>
-              <a:t>Department of </a:t>
-            </a:r>
-          </a:p>
-          <a:p>
-            <a:pPr algn="ctr"/>
-            <a:r>
-              <a:rPr lang="en-US" altLang="ja-JP" sz="3200" dirty="0"/>
-              <a:t>Computer</a:t>
-            </a:r>
-            <a:r>
-              <a:rPr kumimoji="1" lang="en-US" altLang="ja-JP" sz="3200" b="0" dirty="0"/>
-              <a:t> Science and </a:t>
-            </a:r>
-            <a:r>
-              <a:rPr lang="en-US" altLang="ja-JP" sz="3200" b="0" dirty="0"/>
-              <a:t>Engineering</a:t>
-            </a:r>
-            <a:r>
-              <a:rPr kumimoji="1" lang="en-US" altLang="ja-JP" sz="3200" b="0" dirty="0"/>
-              <a:t> </a:t>
-            </a:r>
-            <a:endParaRPr kumimoji="1" lang="ja-JP" altLang="en-US" sz="3200" b="0" dirty="0"/>
           </a:p>
         </p:txBody>
       </p:sp>
